--- a/templates/42-sequence-diagrams-template.pptx
+++ b/templates/42-sequence-diagrams-template.pptx
@@ -3558,7 +3558,7 @@
         <p:spPr>
           <a:xfrm>
             <a:off x="457200" y="1207008"/>
-            <a:ext cx="2743200" cy="182880"/>
+            <a:ext cx="11277295" cy="274320"/>
           </a:xfrm>
           <a:prstGeom prst="rect">
             <a:avLst/>
@@ -3574,13 +3574,13 @@
           <a:p>
             <a:pPr algn="l"/>
             <a:r>
-              <a:rPr lang="en-AU" sz="800" b="1" dirty="0">
+              <a:rPr lang="en-AU" sz="1250" b="1" dirty="0">
                 <a:solidFill>
-                  <a:srgbClr val="6B6A66"/>
+                  <a:srgbClr val="184F95"/>
                 </a:solidFill>
                 <a:latin typeface="Aptos"/>
               </a:rPr>
-              <a:t>HOW TO FILL IT IN</a:t>
+              <a:t>Sequence Diagrams — blank template</a:t>
             </a:r>
           </a:p>
         </p:txBody>
@@ -3593,8 +3593,8 @@
         </p:nvSpPr>
         <p:spPr>
           <a:xfrm>
-            <a:off x="457200" y="1408176"/>
-            <a:ext cx="2743200" cy="914400"/>
+            <a:off x="457200" y="6089904"/>
+            <a:ext cx="11277295" cy="347472"/>
           </a:xfrm>
           <a:prstGeom prst="rect">
             <a:avLst/>
@@ -3610,274 +3610,26 @@
           <a:p>
             <a:pPr algn="l"/>
             <a:r>
-              <a:rPr lang="en-AU" sz="950" dirty="0">
-                <a:solidFill>
-                  <a:srgbClr val="0B0B0B"/>
-                </a:solidFill>
-                <a:latin typeface="Aptos"/>
-              </a:rPr>
-              <a:t>Time runs down the page. Mark which calls block and which return later — that gap is where races live.</a:t>
-            </a:r>
-          </a:p>
-        </p:txBody>
-      </p:sp>
-      <p:sp>
-        <p:nvSpPr>
-          <p:cNvPr id="44" name="shape44"/>
-          <p:cNvSpPr/>
-          <p:nvPr/>
-        </p:nvSpPr>
-        <p:spPr>
-          <a:xfrm>
-            <a:off x="457200" y="2414016"/>
-            <a:ext cx="2743200" cy="182880"/>
-          </a:xfrm>
-          <a:prstGeom prst="rect">
-            <a:avLst/>
-          </a:prstGeom>
-          <a:noFill/>
-          <a:ln>
-            <a:noFill/>
-          </a:ln>
-        </p:spPr>
-        <p:txBody>
-          <a:bodyPr wrap="square" anchor="b" lIns="0" rIns="0" tIns="27432" bIns="27432"/>
-          <a:lstStyle/>
-          <a:p>
-            <a:pPr algn="l"/>
-            <a:r>
-              <a:rPr lang="en-AU" sz="800" b="1" dirty="0">
+              <a:rPr lang="en-AU" sz="850" dirty="0">
                 <a:solidFill>
                   <a:srgbClr val="6B6A66"/>
                 </a:solidFill>
                 <a:latin typeface="Aptos"/>
               </a:rPr>
-              <a:t>WHAT IT IS FOR</a:t>
-            </a:r>
-          </a:p>
-        </p:txBody>
-      </p:sp>
-      <p:sp>
-        <p:nvSpPr>
-          <p:cNvPr id="45" name="shape45"/>
+              <a:t>Time runs down the page. Mark which calls block and which return later — that gap is where races live.</a:t>
+            </a:r>
+          </a:p>
+        </p:txBody>
+      </p:sp>
+      <p:sp>
+        <p:nvSpPr>
+          <p:cNvPr id="44" name="shape44"/>
           <p:cNvSpPr/>
           <p:nvPr/>
         </p:nvSpPr>
         <p:spPr>
           <a:xfrm>
-            <a:off x="457200" y="2615184"/>
-            <a:ext cx="2743200" cy="731520"/>
-          </a:xfrm>
-          <a:prstGeom prst="rect">
-            <a:avLst/>
-          </a:prstGeom>
-          <a:noFill/>
-          <a:ln>
-            <a:noFill/>
-          </a:ln>
-        </p:spPr>
-        <p:txBody>
-          <a:bodyPr wrap="square" anchor="t" lIns="0" rIns="0" tIns="27432" bIns="27432"/>
-          <a:lstStyle/>
-          <a:p>
-            <a:pPr algn="l"/>
-            <a:r>
-              <a:rPr lang="en-AU" sz="950" dirty="0">
-                <a:solidFill>
-                  <a:srgbClr val="0B0B0B"/>
-                </a:solidFill>
-                <a:latin typeface="Aptos"/>
-              </a:rPr>
-              <a:t>Shows the ordered exchange of messages between participants over time to accomplish a specific interaction.</a:t>
-            </a:r>
-          </a:p>
-        </p:txBody>
-      </p:sp>
-      <p:sp>
-        <p:nvSpPr>
-          <p:cNvPr id="46" name="shape46"/>
-          <p:cNvSpPr/>
-          <p:nvPr/>
-        </p:nvSpPr>
-        <p:spPr>
-          <a:xfrm>
-            <a:off x="457200" y="3438144"/>
-            <a:ext cx="2743200" cy="182880"/>
-          </a:xfrm>
-          <a:prstGeom prst="rect">
-            <a:avLst/>
-          </a:prstGeom>
-          <a:noFill/>
-          <a:ln>
-            <a:noFill/>
-          </a:ln>
-        </p:spPr>
-        <p:txBody>
-          <a:bodyPr wrap="square" anchor="b" lIns="0" rIns="0" tIns="27432" bIns="27432"/>
-          <a:lstStyle/>
-          <a:p>
-            <a:pPr algn="l"/>
-            <a:r>
-              <a:rPr lang="en-AU" sz="800" b="1" dirty="0">
-                <a:solidFill>
-                  <a:srgbClr val="6B6A66"/>
-                </a:solidFill>
-                <a:latin typeface="Aptos"/>
-              </a:rPr>
-              <a:t>MOST OFTEN CONFUSED WITH</a:t>
-            </a:r>
-          </a:p>
-        </p:txBody>
-      </p:sp>
-      <p:sp>
-        <p:nvSpPr>
-          <p:cNvPr id="47" name="shape47"/>
-          <p:cNvSpPr/>
-          <p:nvPr/>
-        </p:nvSpPr>
-        <p:spPr>
-          <a:xfrm>
-            <a:off x="457200" y="3639312"/>
-            <a:ext cx="2743200" cy="1737360"/>
-          </a:xfrm>
-          <a:prstGeom prst="rect">
-            <a:avLst/>
-          </a:prstGeom>
-          <a:solidFill>
-            <a:srgbClr val="F7F7F5"/>
-          </a:solidFill>
-          <a:ln>
-            <a:noFill/>
-          </a:ln>
-        </p:spPr>
-        <p:txBody>
-          <a:bodyPr wrap="square" anchor="t" lIns="91440" rIns="91440" tIns="27432" bIns="27432"/>
-          <a:lstStyle/>
-          <a:p>
-            <a:pPr algn="l"/>
-            <a:r>
-              <a:rPr lang="en-AU" sz="900" dirty="0">
-                <a:solidFill>
-                  <a:srgbClr val="0B0B0B"/>
-                </a:solidFill>
-                <a:latin typeface="Aptos"/>
-              </a:rPr>
-              <a:t>Sequence diagrams order messages between components; process models order activities performed by people and systems; state models track what an object becomes. Messages, work, or status is the three-way split.</a:t>
-            </a:r>
-          </a:p>
-        </p:txBody>
-      </p:sp>
-      <p:sp>
-        <p:nvSpPr>
-          <p:cNvPr id="48" name="shape48"/>
-          <p:cNvSpPr/>
-          <p:nvPr/>
-        </p:nvSpPr>
-        <p:spPr>
-          <a:xfrm>
-            <a:off x="457200" y="3639312"/>
-            <a:ext cx="32004" cy="1737360"/>
-          </a:xfrm>
-          <a:prstGeom prst="rect">
-            <a:avLst/>
-          </a:prstGeom>
-          <a:solidFill>
-            <a:srgbClr val="FAB219"/>
-          </a:solidFill>
-          <a:ln>
-            <a:noFill/>
-          </a:ln>
-        </p:spPr>
-        <p:txBody>
-          <a:bodyPr wrap="square" anchor="ctr" lIns="54864" rIns="54864" tIns="27432" bIns="27432"/>
-          <a:lstStyle/>
-          <a:p>
-            <a:pPr algn="l"/>
-            <a:endParaRPr lang="en-AU" sz="1100"/>
-          </a:p>
-        </p:txBody>
-      </p:sp>
-      <p:sp>
-        <p:nvSpPr>
-          <p:cNvPr id="49" name="shape49"/>
-          <p:cNvSpPr/>
-          <p:nvPr/>
-        </p:nvSpPr>
-        <p:spPr>
-          <a:xfrm>
-            <a:off x="457200" y="5486400"/>
-            <a:ext cx="2743200" cy="502920"/>
-          </a:xfrm>
-          <a:prstGeom prst="rect">
-            <a:avLst/>
-          </a:prstGeom>
-          <a:noFill/>
-          <a:ln>
-            <a:noFill/>
-          </a:ln>
-        </p:spPr>
-        <p:txBody>
-          <a:bodyPr wrap="square" anchor="t" lIns="0" rIns="0" tIns="27432" bIns="27432"/>
-          <a:lstStyle/>
-          <a:p>
-            <a:pPr algn="l"/>
-            <a:r>
-              <a:rPr lang="en-AU" sz="800" dirty="0">
-                <a:solidFill>
-                  <a:srgbClr val="6B6A66"/>
-                </a:solidFill>
-                <a:latin typeface="Aptos"/>
-              </a:rPr>
-              <a:t>Tasks: 7.1 Specify and Model Requirements · 7.4 Define Requirements Architecture</a:t>
-            </a:r>
-          </a:p>
-        </p:txBody>
-      </p:sp>
-      <p:sp>
-        <p:nvSpPr>
-          <p:cNvPr id="50" name="shape50"/>
-          <p:cNvSpPr/>
-          <p:nvPr/>
-        </p:nvSpPr>
-        <p:spPr>
-          <a:xfrm>
-            <a:off x="3520440" y="1188720"/>
-            <a:ext cx="8214055" cy="237744"/>
-          </a:xfrm>
-          <a:prstGeom prst="rect">
-            <a:avLst/>
-          </a:prstGeom>
-          <a:noFill/>
-          <a:ln>
-            <a:noFill/>
-          </a:ln>
-        </p:spPr>
-        <p:txBody>
-          <a:bodyPr wrap="square" anchor="b" lIns="0" rIns="0" tIns="27432" bIns="27432"/>
-          <a:lstStyle/>
-          <a:p>
-            <a:pPr algn="l"/>
-            <a:r>
-              <a:rPr lang="en-AU" sz="1050" b="1" dirty="0">
-                <a:solidFill>
-                  <a:srgbClr val="184F95"/>
-                </a:solidFill>
-                <a:latin typeface="Aptos"/>
-              </a:rPr>
-              <a:t>Sequence Diagrams — blank template</a:t>
-            </a:r>
-          </a:p>
-        </p:txBody>
-      </p:sp>
-      <p:sp>
-        <p:nvSpPr>
-          <p:cNvPr id="51" name="shape51"/>
-          <p:cNvSpPr/>
-          <p:nvPr/>
-        </p:nvSpPr>
-        <p:spPr>
-          <a:xfrm>
-            <a:off x="3520440" y="1499616"/>
+            <a:off x="457200" y="1700784"/>
             <a:ext cx="1737360" cy="384048"/>
           </a:xfrm>
           <a:prstGeom prst="roundRect">
@@ -3913,13 +3665,13 @@
       </p:sp>
       <p:cxnSp>
         <p:nvCxnSpPr>
-          <p:cNvPr id="52" name="conn52"/>
+          <p:cNvPr id="45" name="conn45"/>
           <p:cNvCxnSpPr/>
           <p:nvPr/>
         </p:nvCxnSpPr>
         <p:spPr>
           <a:xfrm>
-            <a:off x="4389120" y="1883664"/>
+            <a:off x="1325880" y="2084832"/>
             <a:ext cx="1" cy="2377440"/>
           </a:xfrm>
           <a:prstGeom prst="line">
@@ -3935,13 +3687,13 @@
       </p:cxnSp>
       <p:sp>
         <p:nvSpPr>
-          <p:cNvPr id="53" name="shape53"/>
+          <p:cNvPr id="46" name="shape46"/>
           <p:cNvSpPr/>
           <p:nvPr/>
         </p:nvSpPr>
         <p:spPr>
           <a:xfrm>
-            <a:off x="5679338" y="1499616"/>
+            <a:off x="3637178" y="1700784"/>
             <a:ext cx="1737360" cy="384048"/>
           </a:xfrm>
           <a:prstGeom prst="roundRect">
@@ -3977,13 +3729,13 @@
       </p:sp>
       <p:cxnSp>
         <p:nvCxnSpPr>
-          <p:cNvPr id="54" name="conn54"/>
+          <p:cNvPr id="47" name="conn47"/>
           <p:cNvCxnSpPr/>
           <p:nvPr/>
         </p:nvCxnSpPr>
         <p:spPr>
           <a:xfrm>
-            <a:off x="6548018" y="1883664"/>
+            <a:off x="4505858" y="2084832"/>
             <a:ext cx="1" cy="2377440"/>
           </a:xfrm>
           <a:prstGeom prst="line">
@@ -3999,13 +3751,13 @@
       </p:cxnSp>
       <p:sp>
         <p:nvSpPr>
-          <p:cNvPr id="55" name="shape55"/>
+          <p:cNvPr id="48" name="shape48"/>
           <p:cNvSpPr/>
           <p:nvPr/>
         </p:nvSpPr>
         <p:spPr>
           <a:xfrm>
-            <a:off x="7838237" y="1499616"/>
+            <a:off x="6817157" y="1700784"/>
             <a:ext cx="1737360" cy="384048"/>
           </a:xfrm>
           <a:prstGeom prst="roundRect">
@@ -4041,13 +3793,13 @@
       </p:sp>
       <p:cxnSp>
         <p:nvCxnSpPr>
-          <p:cNvPr id="56" name="conn56"/>
+          <p:cNvPr id="49" name="conn49"/>
           <p:cNvCxnSpPr/>
           <p:nvPr/>
         </p:nvCxnSpPr>
         <p:spPr>
           <a:xfrm>
-            <a:off x="8706917" y="1883664"/>
+            <a:off x="7685837" y="2084832"/>
             <a:ext cx="1" cy="2377440"/>
           </a:xfrm>
           <a:prstGeom prst="line">
@@ -4063,13 +3815,13 @@
       </p:cxnSp>
       <p:sp>
         <p:nvSpPr>
-          <p:cNvPr id="57" name="shape57"/>
+          <p:cNvPr id="50" name="shape50"/>
           <p:cNvSpPr/>
           <p:nvPr/>
         </p:nvSpPr>
         <p:spPr>
           <a:xfrm>
-            <a:off x="9997135" y="1499616"/>
+            <a:off x="9997135" y="1700784"/>
             <a:ext cx="1737360" cy="384048"/>
           </a:xfrm>
           <a:prstGeom prst="roundRect">
@@ -4105,13 +3857,13 @@
       </p:sp>
       <p:cxnSp>
         <p:nvCxnSpPr>
-          <p:cNvPr id="58" name="conn58"/>
+          <p:cNvPr id="51" name="conn51"/>
           <p:cNvCxnSpPr/>
           <p:nvPr/>
         </p:nvCxnSpPr>
         <p:spPr>
           <a:xfrm>
-            <a:off x="10865815" y="1883664"/>
+            <a:off x="10865815" y="2084832"/>
             <a:ext cx="1" cy="2377440"/>
           </a:xfrm>
           <a:prstGeom prst="line">
@@ -4127,14 +3879,14 @@
       </p:cxnSp>
       <p:cxnSp>
         <p:nvCxnSpPr>
-          <p:cNvPr id="59" name="conn59"/>
+          <p:cNvPr id="52" name="conn52"/>
           <p:cNvCxnSpPr/>
           <p:nvPr/>
         </p:nvCxnSpPr>
         <p:spPr>
           <a:xfrm>
-            <a:off x="4389120" y="2276856"/>
-            <a:ext cx="2158898" cy="1"/>
+            <a:off x="1325880" y="2478024"/>
+            <a:ext cx="3179978" cy="1"/>
           </a:xfrm>
           <a:prstGeom prst="line">
             <a:avLst/>
@@ -4149,14 +3901,14 @@
       </p:cxnSp>
       <p:sp>
         <p:nvSpPr>
-          <p:cNvPr id="60" name="shape60"/>
+          <p:cNvPr id="53" name="shape53"/>
           <p:cNvSpPr/>
           <p:nvPr/>
         </p:nvSpPr>
         <p:spPr>
           <a:xfrm>
-            <a:off x="4389120" y="2020824"/>
-            <a:ext cx="2158898" cy="219456"/>
+            <a:off x="1325880" y="2221992"/>
+            <a:ext cx="3179978" cy="219456"/>
           </a:xfrm>
           <a:prstGeom prst="rect">
             <a:avLst/>
@@ -4177,14 +3929,14 @@
       </p:sp>
       <p:cxnSp>
         <p:nvCxnSpPr>
-          <p:cNvPr id="61" name="conn61"/>
+          <p:cNvPr id="54" name="conn54"/>
           <p:cNvCxnSpPr/>
           <p:nvPr/>
         </p:nvCxnSpPr>
         <p:spPr>
           <a:xfrm flipH="1">
-            <a:off x="4389120" y="2697480"/>
-            <a:ext cx="2158898" cy="1"/>
+            <a:off x="1325880" y="2898648"/>
+            <a:ext cx="3179978" cy="1"/>
           </a:xfrm>
           <a:prstGeom prst="line">
             <a:avLst/>
@@ -4199,14 +3951,14 @@
       </p:cxnSp>
       <p:sp>
         <p:nvSpPr>
-          <p:cNvPr id="62" name="shape62"/>
+          <p:cNvPr id="55" name="shape55"/>
           <p:cNvSpPr/>
           <p:nvPr/>
         </p:nvSpPr>
         <p:spPr>
           <a:xfrm>
-            <a:off x="4389120" y="2441448"/>
-            <a:ext cx="2158898" cy="219456"/>
+            <a:off x="1325880" y="2642616"/>
+            <a:ext cx="3179978" cy="219456"/>
           </a:xfrm>
           <a:prstGeom prst="rect">
             <a:avLst/>
@@ -4227,14 +3979,14 @@
       </p:sp>
       <p:cxnSp>
         <p:nvCxnSpPr>
-          <p:cNvPr id="63" name="conn63"/>
+          <p:cNvPr id="56" name="conn56"/>
           <p:cNvCxnSpPr/>
           <p:nvPr/>
         </p:nvCxnSpPr>
         <p:spPr>
           <a:xfrm>
-            <a:off x="4389120" y="3118104"/>
-            <a:ext cx="4317797" cy="1"/>
+            <a:off x="1325880" y="3319272"/>
+            <a:ext cx="6359957" cy="1"/>
           </a:xfrm>
           <a:prstGeom prst="line">
             <a:avLst/>
@@ -4249,14 +4001,14 @@
       </p:cxnSp>
       <p:sp>
         <p:nvSpPr>
-          <p:cNvPr id="64" name="shape64"/>
+          <p:cNvPr id="57" name="shape57"/>
           <p:cNvSpPr/>
           <p:nvPr/>
         </p:nvSpPr>
         <p:spPr>
           <a:xfrm>
-            <a:off x="4389120" y="2862072"/>
-            <a:ext cx="4317797" cy="219456"/>
+            <a:off x="1325880" y="3063240"/>
+            <a:ext cx="6359957" cy="219456"/>
           </a:xfrm>
           <a:prstGeom prst="rect">
             <a:avLst/>
@@ -4277,14 +4029,14 @@
       </p:sp>
       <p:cxnSp>
         <p:nvCxnSpPr>
-          <p:cNvPr id="65" name="conn65"/>
+          <p:cNvPr id="58" name="conn58"/>
           <p:cNvCxnSpPr/>
           <p:nvPr/>
         </p:nvCxnSpPr>
         <p:spPr>
           <a:xfrm>
-            <a:off x="4389120" y="3538728"/>
-            <a:ext cx="6476695" cy="1"/>
+            <a:off x="1325880" y="3739896"/>
+            <a:ext cx="9539935" cy="1"/>
           </a:xfrm>
           <a:prstGeom prst="line">
             <a:avLst/>
@@ -4299,14 +4051,14 @@
       </p:cxnSp>
       <p:sp>
         <p:nvSpPr>
-          <p:cNvPr id="66" name="shape66"/>
+          <p:cNvPr id="59" name="shape59"/>
           <p:cNvSpPr/>
           <p:nvPr/>
         </p:nvSpPr>
         <p:spPr>
           <a:xfrm>
-            <a:off x="4389120" y="3282696"/>
-            <a:ext cx="6476695" cy="219456"/>
+            <a:off x="1325880" y="3483864"/>
+            <a:ext cx="9539935" cy="219456"/>
           </a:xfrm>
           <a:prstGeom prst="rect">
             <a:avLst/>
@@ -4327,14 +4079,14 @@
       </p:sp>
       <p:cxnSp>
         <p:nvCxnSpPr>
-          <p:cNvPr id="67" name="conn67"/>
+          <p:cNvPr id="60" name="conn60"/>
           <p:cNvCxnSpPr/>
           <p:nvPr/>
         </p:nvCxnSpPr>
         <p:spPr>
           <a:xfrm flipH="1">
-            <a:off x="4389120" y="3959352"/>
-            <a:ext cx="4317797" cy="1"/>
+            <a:off x="1325880" y="4160520"/>
+            <a:ext cx="6359957" cy="1"/>
           </a:xfrm>
           <a:prstGeom prst="line">
             <a:avLst/>
@@ -4349,14 +4101,14 @@
       </p:cxnSp>
       <p:sp>
         <p:nvSpPr>
-          <p:cNvPr id="68" name="shape68"/>
+          <p:cNvPr id="61" name="shape61"/>
           <p:cNvSpPr/>
           <p:nvPr/>
         </p:nvSpPr>
         <p:spPr>
           <a:xfrm>
-            <a:off x="4389120" y="3703320"/>
-            <a:ext cx="4317797" cy="219456"/>
+            <a:off x="1325880" y="3904488"/>
+            <a:ext cx="6359957" cy="219456"/>
           </a:xfrm>
           <a:prstGeom prst="rect">
             <a:avLst/>
